--- a/test_sandbox/out_presentation.pptx
+++ b/test_sandbox/out_presentation.pptx
@@ -3092,7 +3092,7 @@
       <p:grpSpPr/>
       <p:pic>
         <p:nvPicPr>
-          <p:cNvPr id="2" name="Picture 1" descr="_temp_slide_0.png"/>
+          <p:cNvPr id="2" name="Picture 1" descr="slide_0.png"/>
           <p:cNvPicPr>
             <a:picLocks noChangeAspect="1"/>
           </p:cNvPicPr>
@@ -3106,8 +3106,8 @@
         </p:blipFill>
         <p:spPr>
           <a:xfrm>
-            <a:off x="0" y="0"/>
-            <a:ext cx="9144000" cy="6858000"/>
+            <a:off x="2149231" y="0"/>
+            <a:ext cx="4845538" cy="6858000"/>
           </a:xfrm>
           <a:prstGeom prst="rect">
             <a:avLst/>
@@ -3134,7 +3134,7 @@
       <p:grpSpPr/>
       <p:pic>
         <p:nvPicPr>
-          <p:cNvPr id="2" name="Picture 1" descr="_temp_slide_1.png"/>
+          <p:cNvPr id="2" name="Picture 1" descr="slide_1.png"/>
           <p:cNvPicPr>
             <a:picLocks noChangeAspect="1"/>
           </p:cNvPicPr>
@@ -3148,8 +3148,8 @@
         </p:blipFill>
         <p:spPr>
           <a:xfrm>
-            <a:off x="0" y="0"/>
-            <a:ext cx="9144000" cy="6858000"/>
+            <a:off x="2149231" y="0"/>
+            <a:ext cx="4845538" cy="6858000"/>
           </a:xfrm>
           <a:prstGeom prst="rect">
             <a:avLst/>
@@ -3176,7 +3176,7 @@
       <p:grpSpPr/>
       <p:pic>
         <p:nvPicPr>
-          <p:cNvPr id="2" name="Picture 1" descr="_temp_slide_2.png"/>
+          <p:cNvPr id="2" name="Picture 1" descr="slide_2.png"/>
           <p:cNvPicPr>
             <a:picLocks noChangeAspect="1"/>
           </p:cNvPicPr>
@@ -3190,8 +3190,8 @@
         </p:blipFill>
         <p:spPr>
           <a:xfrm>
-            <a:off x="0" y="0"/>
-            <a:ext cx="9144000" cy="6858000"/>
+            <a:off x="2149231" y="0"/>
+            <a:ext cx="4845538" cy="6858000"/>
           </a:xfrm>
           <a:prstGeom prst="rect">
             <a:avLst/>
